--- a/(Advanced) Multimedia Information Processing and Communications/21 (12) Object Detection/Object Detection.pptx
+++ b/(Advanced) Multimedia Information Processing and Communications/21 (12) Object Detection/Object Detection.pptx
@@ -35,18 +35,11 @@
   <p:notesSz cx="6858000" cy="9144000"/>
   <p:embeddedFontLst>
     <p:embeddedFont>
-      <p:font typeface="Calibri" panose="020F0502020204030204" pitchFamily="34" charset="0"/>
+      <p:font typeface="Helvetica Neue" panose="02000503000000020004" pitchFamily="2" charset="0"/>
       <p:regular r:id="rId25"/>
       <p:bold r:id="rId26"/>
       <p:italic r:id="rId27"/>
       <p:boldItalic r:id="rId28"/>
-    </p:embeddedFont>
-    <p:embeddedFont>
-      <p:font typeface="Helvetica Neue" panose="02000503000000020004" pitchFamily="2" charset="0"/>
-      <p:regular r:id="rId29"/>
-      <p:bold r:id="rId30"/>
-      <p:italic r:id="rId31"/>
-      <p:boldItalic r:id="rId32"/>
     </p:embeddedFont>
   </p:embeddedFontLst>
   <p:defaultTextStyle>
@@ -2716,8 +2709,8 @@
         </p:nvSpPr>
         <p:spPr>
           <a:xfrm>
-            <a:off x="1143000" y="685800"/>
-            <a:ext cx="4572000" cy="3429000"/>
+            <a:off x="1006475" y="685800"/>
+            <a:ext cx="4845050" cy="3429000"/>
           </a:xfrm>
           <a:custGeom>
             <a:avLst/>
@@ -27561,7 +27554,7 @@
         </p:spPr>
         <p:txBody>
           <a:bodyPr spcFirstLastPara="1" wrap="square" lIns="52125" tIns="52125" rIns="52125" bIns="52125" anchor="t" anchorCtr="0">
-            <a:noAutofit/>
+            <a:normAutofit fontScale="92500"/>
           </a:bodyPr>
           <a:lstStyle/>
           <a:p>
@@ -27582,14 +27575,14 @@
               <a:buChar char="»"/>
             </a:pPr>
             <a:r>
-              <a:rPr lang="en-GB" sz="2300">
+              <a:rPr lang="en-GB" sz="2300" dirty="0">
                 <a:solidFill>
                   <a:srgbClr val="1E1E1E"/>
                 </a:solidFill>
               </a:rPr>
               <a:t>Detecting a reference object (left) in a cluttered scene (right) </a:t>
             </a:r>
-            <a:endParaRPr sz="2300">
+            <a:endParaRPr sz="2300" dirty="0">
               <a:solidFill>
                 <a:srgbClr val="1E1E1E"/>
               </a:solidFill>
@@ -27613,14 +27606,14 @@
               <a:buChar char="»"/>
             </a:pPr>
             <a:r>
-              <a:rPr lang="en-GB" sz="2300">
+              <a:rPr lang="en-GB" sz="2300" dirty="0">
                 <a:solidFill>
                   <a:srgbClr val="1E1E1E"/>
                 </a:solidFill>
               </a:rPr>
               <a:t>Using feature extraction and feature matching</a:t>
             </a:r>
-            <a:endParaRPr sz="2300">
+            <a:endParaRPr sz="2300" dirty="0">
               <a:solidFill>
                 <a:srgbClr val="1E1E1E"/>
               </a:solidFill>
@@ -27644,7 +27637,7 @@
               <a:buChar char="»"/>
             </a:pPr>
             <a:r>
-              <a:rPr lang="en-GB" sz="2300" u="sng">
+              <a:rPr lang="en-GB" sz="2300" u="sng" dirty="0">
                 <a:solidFill>
                   <a:schemeClr val="hlink"/>
                 </a:solidFill>
@@ -27653,15 +27646,15 @@
               <a:t>RANSAC</a:t>
             </a:r>
             <a:r>
-              <a:rPr lang="en-GB" sz="2300">
+              <a:rPr lang="en-GB" sz="2300" dirty="0">
                 <a:solidFill>
                   <a:srgbClr val="1E1E1E"/>
                 </a:solidFill>
               </a:rPr>
-              <a:t> used to estimate location of object in </a:t>
+              <a:t> (Random sample consensus) used to estimate location of object in </a:t>
             </a:r>
             <a:r>
-              <a:rPr lang="en-GB" sz="2300" i="1">
+              <a:rPr lang="en-GB" sz="2300" i="1" dirty="0">
                 <a:solidFill>
                   <a:srgbClr val="1E1E1E"/>
                 </a:solidFill>
@@ -27669,14 +27662,14 @@
               <a:t>test image</a:t>
             </a:r>
             <a:r>
-              <a:rPr lang="en-GB" sz="2300">
+              <a:rPr lang="en-GB" sz="2300" dirty="0">
                 <a:solidFill>
                   <a:srgbClr val="1E1E1E"/>
                 </a:solidFill>
               </a:rPr>
               <a:t>*</a:t>
             </a:r>
-            <a:endParaRPr sz="2300">
+            <a:endParaRPr sz="2300" dirty="0">
               <a:solidFill>
                 <a:srgbClr val="1E1E1E"/>
               </a:solidFill>
